--- a/ppts_output_v3/15_教育费附加-地方教育附加风险指引.pptx
+++ b/ppts_output_v3/15_教育费附加-地方教育附加风险指引.pptx
@@ -3296,7 +3296,7 @@
           <a:p>
             <a:pPr algn="l">
               <a:lnSpc>
-                <a:spcPts val="1820"/>
+                <a:spcPts val="2080"/>
               </a:lnSpc>
               <a:spcBef>
                 <a:spcPts val="0"/>
@@ -3306,7 +3306,7 @@
               </a:spcAft>
             </a:pPr>
             <a:r>
-              <a:rPr sz="1400" b="1">
+              <a:rPr sz="1600" b="1">
                 <a:solidFill>
                   <a:srgbClr val="1B3A5C"/>
                 </a:solidFill>
@@ -3318,7 +3318,7 @@
           <a:p>
             <a:pPr algn="l">
               <a:lnSpc>
-                <a:spcPts val="1820"/>
+                <a:spcPts val="2080"/>
               </a:lnSpc>
               <a:spcBef>
                 <a:spcPts val="800"/>
@@ -3328,7 +3328,7 @@
               </a:spcAft>
             </a:pPr>
             <a:r>
-              <a:rPr sz="1400" b="1">
+              <a:rPr sz="1600" b="1">
                 <a:solidFill>
                   <a:srgbClr val="333333"/>
                 </a:solidFill>
@@ -3340,7 +3340,7 @@
           <a:p>
             <a:pPr algn="l">
               <a:lnSpc>
-                <a:spcPts val="1430"/>
+                <a:spcPts val="1820"/>
               </a:lnSpc>
               <a:spcBef>
                 <a:spcPts val="200"/>
@@ -3350,7 +3350,7 @@
               </a:spcAft>
             </a:pPr>
             <a:r>
-              <a:rPr sz="1100" b="0">
+              <a:rPr sz="1400" b="0">
                 <a:solidFill>
                   <a:srgbClr val="000000"/>
                 </a:solidFill>
@@ -3362,7 +3362,7 @@
           <a:p>
             <a:pPr algn="l">
               <a:lnSpc>
-                <a:spcPts val="1820"/>
+                <a:spcPts val="2080"/>
               </a:lnSpc>
               <a:spcBef>
                 <a:spcPts val="800"/>
@@ -3372,7 +3372,7 @@
               </a:spcAft>
             </a:pPr>
             <a:r>
-              <a:rPr sz="1400" b="1">
+              <a:rPr sz="1600" b="1">
                 <a:solidFill>
                   <a:srgbClr val="1B5C9E"/>
                 </a:solidFill>
@@ -3384,7 +3384,7 @@
           <a:p>
             <a:pPr algn="l">
               <a:lnSpc>
-                <a:spcPts val="1430"/>
+                <a:spcPts val="1820"/>
               </a:lnSpc>
               <a:spcBef>
                 <a:spcPts val="200"/>
@@ -3394,7 +3394,7 @@
               </a:spcAft>
             </a:pPr>
             <a:r>
-              <a:rPr sz="1100" b="0">
+              <a:rPr sz="1400" b="0">
                 <a:solidFill>
                   <a:srgbClr val="000000"/>
                 </a:solidFill>
@@ -3406,7 +3406,7 @@
           <a:p>
             <a:pPr algn="l">
               <a:lnSpc>
-                <a:spcPts val="1820"/>
+                <a:spcPts val="2080"/>
               </a:lnSpc>
               <a:spcBef>
                 <a:spcPts val="800"/>
@@ -3416,7 +3416,7 @@
               </a:spcAft>
             </a:pPr>
             <a:r>
-              <a:rPr sz="1400" b="1">
+              <a:rPr sz="1600" b="1">
                 <a:solidFill>
                   <a:srgbClr val="CC3333"/>
                 </a:solidFill>
@@ -3428,7 +3428,7 @@
           <a:p>
             <a:pPr algn="l">
               <a:lnSpc>
-                <a:spcPts val="1430"/>
+                <a:spcPts val="1820"/>
               </a:lnSpc>
               <a:spcBef>
                 <a:spcPts val="200"/>
@@ -3438,7 +3438,7 @@
               </a:spcAft>
             </a:pPr>
             <a:r>
-              <a:rPr sz="1100" b="0">
+              <a:rPr sz="1400" b="0">
                 <a:solidFill>
                   <a:srgbClr val="000000"/>
                 </a:solidFill>
@@ -3450,7 +3450,7 @@
           <a:p>
             <a:pPr algn="l">
               <a:lnSpc>
-                <a:spcPts val="1820"/>
+                <a:spcPts val="2080"/>
               </a:lnSpc>
               <a:spcBef>
                 <a:spcPts val="800"/>
@@ -3460,7 +3460,7 @@
               </a:spcAft>
             </a:pPr>
             <a:r>
-              <a:rPr sz="1400" b="1">
+              <a:rPr sz="1600" b="1">
                 <a:solidFill>
                   <a:srgbClr val="008040"/>
                 </a:solidFill>
@@ -3472,7 +3472,7 @@
           <a:p>
             <a:pPr algn="l">
               <a:lnSpc>
-                <a:spcPts val="1430"/>
+                <a:spcPts val="1820"/>
               </a:lnSpc>
               <a:spcBef>
                 <a:spcPts val="200"/>
@@ -3482,7 +3482,7 @@
               </a:spcAft>
             </a:pPr>
             <a:r>
-              <a:rPr sz="1100" b="0">
+              <a:rPr sz="1400" b="0">
                 <a:solidFill>
                   <a:srgbClr val="000000"/>
                 </a:solidFill>
@@ -3494,7 +3494,7 @@
           <a:p>
             <a:pPr algn="l">
               <a:lnSpc>
-                <a:spcPts val="1430"/>
+                <a:spcPts val="1820"/>
               </a:lnSpc>
               <a:spcBef>
                 <a:spcPts val="200"/>
@@ -3504,7 +3504,7 @@
               </a:spcAft>
             </a:pPr>
             <a:r>
-              <a:rPr sz="1100" b="0">
+              <a:rPr sz="1400" b="0">
                 <a:solidFill>
                   <a:srgbClr val="000000"/>
                 </a:solidFill>

--- a/ppts_output_v3/15_教育费附加-地方教育附加风险指引.pptx
+++ b/ppts_output_v3/15_教育费附加-地方教育附加风险指引.pptx
@@ -3489,28 +3489,6 @@
                 <a:latin typeface="Microsoft YaHei"/>
               </a:rPr>
               <a:t>企业核查补缴增值税或消费税时，是否同时补缴教育费附加、地方教育附加。</a:t>
-            </a:r>
-          </a:p>
-          <a:p>
-            <a:pPr algn="l">
-              <a:lnSpc>
-                <a:spcPts val="1820"/>
-              </a:lnSpc>
-              <a:spcBef>
-                <a:spcPts val="200"/>
-              </a:spcBef>
-              <a:spcAft>
-                <a:spcPts val="200"/>
-              </a:spcAft>
-            </a:pPr>
-            <a:r>
-              <a:rPr sz="1400" b="0">
-                <a:solidFill>
-                  <a:srgbClr val="000000"/>
-                </a:solidFill>
-                <a:latin typeface="Microsoft YaHei"/>
-              </a:rPr>
-              <a:t>327</a:t>
             </a:r>
           </a:p>
         </p:txBody>

--- a/ppts_output_v3/15_教育费附加-地方教育附加风险指引.pptx
+++ b/ppts_output_v3/15_教育费附加-地方教育附加风险指引.pptx
@@ -3400,7 +3400,7 @@
                 </a:solidFill>
                 <a:latin typeface="Microsoft YaHei"/>
               </a:rPr>
-              <a:t>根据《财政部 税务总局关于城市维护建设税计税依据确定办法等事项的公告》（财政部 税务总局公告2021 年第28 号）的规定：一、城市维护建设税以纳税人依法实际缴纳的增值税、消费税税额（以下简称两税税额）为计税依据。二、教育费附加、地方教育附加计征依据与城市维护建设税计税依据一致，按本公告第一条规定执行。《国家税务总局关于城市维护建设税征收管理有关事项的公告》（国家税务总局公告 2021 年第 26 号）第五条第二款规定，采用委托代征、代扣代缴、代收代缴、预缴、补缴等方式缴纳两税的，应当同时缴纳城建税。</a:t>
+              <a:t>根据《财政部 税务总局关于城市维护建设税计税依据确定办法等事项的公告》（财政部 税务总局公告2021年第28号）的规定：一、城市维护建设税以纳税人依法实际缴纳的增值税、消费税税额（以下简称两税税额）为计税依据。二、教育费附加、地方教育附加计征依据与城市维护建设税计税依据一致，按本公告第一条规定执行。《国家税务总局关于城市维护建设税征收管理有关事项的公告》（国家税务总局公告2021年第26号）第五条第二款规定，采用委托代征、代扣代缴、代收代缴、预缴、补缴等方式缴纳两税的，应当同时缴纳城建税。</a:t>
             </a:r>
           </a:p>
           <a:p>

--- a/ppts_output_v3/15_教育费附加-地方教育附加风险指引.pptx
+++ b/ppts_output_v3/15_教育费附加-地方教育附加风险指引.pptx
@@ -3292,11 +3292,10 @@
             <a:spAutoFit/>
           </a:bodyPr>
           <a:lstStyle/>
-          <a:p/>
           <a:p>
             <a:pPr algn="l">
               <a:lnSpc>
-                <a:spcPts val="2080"/>
+                <a:spcPct val="125000"/>
               </a:lnSpc>
               <a:spcBef>
                 <a:spcPts val="0"/>
@@ -3318,7 +3317,7 @@
           <a:p>
             <a:pPr algn="l">
               <a:lnSpc>
-                <a:spcPts val="2080"/>
+                <a:spcPct val="125000"/>
               </a:lnSpc>
               <a:spcBef>
                 <a:spcPts val="800"/>
@@ -3340,7 +3339,7 @@
           <a:p>
             <a:pPr algn="l">
               <a:lnSpc>
-                <a:spcPts val="1820"/>
+                <a:spcPct val="125000"/>
               </a:lnSpc>
               <a:spcBef>
                 <a:spcPts val="200"/>
@@ -3362,7 +3361,7 @@
           <a:p>
             <a:pPr algn="l">
               <a:lnSpc>
-                <a:spcPts val="2080"/>
+                <a:spcPct val="125000"/>
               </a:lnSpc>
               <a:spcBef>
                 <a:spcPts val="800"/>
@@ -3384,7 +3383,7 @@
           <a:p>
             <a:pPr algn="l">
               <a:lnSpc>
-                <a:spcPts val="1820"/>
+                <a:spcPct val="125000"/>
               </a:lnSpc>
               <a:spcBef>
                 <a:spcPts val="200"/>
@@ -3406,7 +3405,7 @@
           <a:p>
             <a:pPr algn="l">
               <a:lnSpc>
-                <a:spcPts val="2080"/>
+                <a:spcPct val="125000"/>
               </a:lnSpc>
               <a:spcBef>
                 <a:spcPts val="800"/>
@@ -3428,7 +3427,7 @@
           <a:p>
             <a:pPr algn="l">
               <a:lnSpc>
-                <a:spcPts val="1820"/>
+                <a:spcPct val="125000"/>
               </a:lnSpc>
               <a:spcBef>
                 <a:spcPts val="200"/>
@@ -3450,7 +3449,7 @@
           <a:p>
             <a:pPr algn="l">
               <a:lnSpc>
-                <a:spcPts val="2080"/>
+                <a:spcPct val="125000"/>
               </a:lnSpc>
               <a:spcBef>
                 <a:spcPts val="800"/>
@@ -3472,7 +3471,7 @@
           <a:p>
             <a:pPr algn="l">
               <a:lnSpc>
-                <a:spcPts val="1820"/>
+                <a:spcPct val="125000"/>
               </a:lnSpc>
               <a:spcBef>
                 <a:spcPts val="200"/>

--- a/ppts_output_v3/15_教育费附加-地方教育附加风险指引.pptx
+++ b/ppts_output_v3/15_教育费附加-地方教育附加风险指引.pptx
@@ -3301,7 +3301,7 @@
                 <a:spcPts val="0"/>
               </a:spcBef>
               <a:spcAft>
-                <a:spcPts val="600"/>
+                <a:spcPts val="0"/>
               </a:spcAft>
             </a:pPr>
             <a:r>
@@ -3320,10 +3320,10 @@
                 <a:spcPct val="125000"/>
               </a:lnSpc>
               <a:spcBef>
-                <a:spcPts val="800"/>
+                <a:spcPts val="0"/>
               </a:spcBef>
               <a:spcAft>
-                <a:spcPts val="300"/>
+                <a:spcPts val="0"/>
               </a:spcAft>
             </a:pPr>
             <a:r>
@@ -3342,10 +3342,10 @@
                 <a:spcPct val="125000"/>
               </a:lnSpc>
               <a:spcBef>
-                <a:spcPts val="200"/>
+                <a:spcPts val="0"/>
               </a:spcBef>
               <a:spcAft>
-                <a:spcPts val="200"/>
+                <a:spcPts val="0"/>
               </a:spcAft>
             </a:pPr>
             <a:r>
@@ -3364,10 +3364,10 @@
                 <a:spcPct val="125000"/>
               </a:lnSpc>
               <a:spcBef>
-                <a:spcPts val="800"/>
+                <a:spcPts val="0"/>
               </a:spcBef>
               <a:spcAft>
-                <a:spcPts val="300"/>
+                <a:spcPts val="0"/>
               </a:spcAft>
             </a:pPr>
             <a:r>
@@ -3386,10 +3386,10 @@
                 <a:spcPct val="125000"/>
               </a:lnSpc>
               <a:spcBef>
-                <a:spcPts val="200"/>
+                <a:spcPts val="0"/>
               </a:spcBef>
               <a:spcAft>
-                <a:spcPts val="200"/>
+                <a:spcPts val="0"/>
               </a:spcAft>
             </a:pPr>
             <a:r>
@@ -3408,10 +3408,10 @@
                 <a:spcPct val="125000"/>
               </a:lnSpc>
               <a:spcBef>
-                <a:spcPts val="800"/>
+                <a:spcPts val="0"/>
               </a:spcBef>
               <a:spcAft>
-                <a:spcPts val="300"/>
+                <a:spcPts val="0"/>
               </a:spcAft>
             </a:pPr>
             <a:r>
@@ -3430,10 +3430,10 @@
                 <a:spcPct val="125000"/>
               </a:lnSpc>
               <a:spcBef>
-                <a:spcPts val="200"/>
+                <a:spcPts val="0"/>
               </a:spcBef>
               <a:spcAft>
-                <a:spcPts val="200"/>
+                <a:spcPts val="0"/>
               </a:spcAft>
             </a:pPr>
             <a:r>
@@ -3452,10 +3452,10 @@
                 <a:spcPct val="125000"/>
               </a:lnSpc>
               <a:spcBef>
-                <a:spcPts val="800"/>
+                <a:spcPts val="0"/>
               </a:spcBef>
               <a:spcAft>
-                <a:spcPts val="300"/>
+                <a:spcPts val="0"/>
               </a:spcAft>
             </a:pPr>
             <a:r>
@@ -3474,10 +3474,10 @@
                 <a:spcPct val="125000"/>
               </a:lnSpc>
               <a:spcBef>
-                <a:spcPts val="200"/>
+                <a:spcPts val="0"/>
               </a:spcBef>
               <a:spcAft>
-                <a:spcPts val="200"/>
+                <a:spcPts val="0"/>
               </a:spcAft>
             </a:pPr>
             <a:r>

--- a/ppts_output_v3/15_教育费附加-地方教育附加风险指引.pptx
+++ b/ppts_output_v3/15_教育费附加-地方教育附加风险指引.pptx
@@ -3259,7 +3259,7 @@
           <a:bodyPr rtlCol="0" anchor="ctr" wrap="square" lIns="365760"/>
           <a:lstStyle/>
           <a:p>
-            <a:pPr algn="l"/>
+            <a:pPr algn="just"/>
             <a:r>
               <a:rPr sz="1500" b="1">
                 <a:solidFill>
@@ -3293,7 +3293,7 @@
           </a:bodyPr>
           <a:lstStyle/>
           <a:p>
-            <a:pPr algn="l">
+            <a:pPr algn="just">
               <a:lnSpc>
                 <a:spcPct val="125000"/>
               </a:lnSpc>
@@ -3315,7 +3315,7 @@
             </a:r>
           </a:p>
           <a:p>
-            <a:pPr algn="l">
+            <a:pPr algn="just">
               <a:lnSpc>
                 <a:spcPct val="125000"/>
               </a:lnSpc>
@@ -3337,7 +3337,7 @@
             </a:r>
           </a:p>
           <a:p>
-            <a:pPr algn="l">
+            <a:pPr algn="just">
               <a:lnSpc>
                 <a:spcPct val="125000"/>
               </a:lnSpc>
@@ -3359,7 +3359,7 @@
             </a:r>
           </a:p>
           <a:p>
-            <a:pPr algn="l">
+            <a:pPr algn="just">
               <a:lnSpc>
                 <a:spcPct val="125000"/>
               </a:lnSpc>
@@ -3381,7 +3381,7 @@
             </a:r>
           </a:p>
           <a:p>
-            <a:pPr algn="l">
+            <a:pPr algn="just">
               <a:lnSpc>
                 <a:spcPct val="125000"/>
               </a:lnSpc>
@@ -3403,7 +3403,7 @@
             </a:r>
           </a:p>
           <a:p>
-            <a:pPr algn="l">
+            <a:pPr algn="just">
               <a:lnSpc>
                 <a:spcPct val="125000"/>
               </a:lnSpc>
@@ -3425,7 +3425,7 @@
             </a:r>
           </a:p>
           <a:p>
-            <a:pPr algn="l">
+            <a:pPr algn="just">
               <a:lnSpc>
                 <a:spcPct val="125000"/>
               </a:lnSpc>
@@ -3447,7 +3447,7 @@
             </a:r>
           </a:p>
           <a:p>
-            <a:pPr algn="l">
+            <a:pPr algn="just">
               <a:lnSpc>
                 <a:spcPct val="125000"/>
               </a:lnSpc>
@@ -3469,7 +3469,7 @@
             </a:r>
           </a:p>
           <a:p>
-            <a:pPr algn="l">
+            <a:pPr algn="just">
               <a:lnSpc>
                 <a:spcPct val="125000"/>
               </a:lnSpc>

--- a/ppts_output_v3/15_教育费附加-地方教育附加风险指引.pptx
+++ b/ppts_output_v3/15_教育费附加-地方教育附加风险指引.pptx
@@ -3295,7 +3295,7 @@
           <a:p>
             <a:pPr algn="just">
               <a:lnSpc>
-                <a:spcPct val="125000"/>
+                <a:spcPct val="110000"/>
               </a:lnSpc>
               <a:spcBef>
                 <a:spcPts val="0"/>
@@ -3317,7 +3317,7 @@
           <a:p>
             <a:pPr algn="just">
               <a:lnSpc>
-                <a:spcPct val="125000"/>
+                <a:spcPct val="110000"/>
               </a:lnSpc>
               <a:spcBef>
                 <a:spcPts val="0"/>
@@ -3339,7 +3339,7 @@
           <a:p>
             <a:pPr algn="just">
               <a:lnSpc>
-                <a:spcPct val="125000"/>
+                <a:spcPct val="110000"/>
               </a:lnSpc>
               <a:spcBef>
                 <a:spcPts val="0"/>
@@ -3361,7 +3361,7 @@
           <a:p>
             <a:pPr algn="just">
               <a:lnSpc>
-                <a:spcPct val="125000"/>
+                <a:spcPct val="110000"/>
               </a:lnSpc>
               <a:spcBef>
                 <a:spcPts val="0"/>
@@ -3383,7 +3383,7 @@
           <a:p>
             <a:pPr algn="just">
               <a:lnSpc>
-                <a:spcPct val="125000"/>
+                <a:spcPct val="110000"/>
               </a:lnSpc>
               <a:spcBef>
                 <a:spcPts val="0"/>
@@ -3405,7 +3405,7 @@
           <a:p>
             <a:pPr algn="just">
               <a:lnSpc>
-                <a:spcPct val="125000"/>
+                <a:spcPct val="110000"/>
               </a:lnSpc>
               <a:spcBef>
                 <a:spcPts val="0"/>
@@ -3427,7 +3427,7 @@
           <a:p>
             <a:pPr algn="just">
               <a:lnSpc>
-                <a:spcPct val="125000"/>
+                <a:spcPct val="110000"/>
               </a:lnSpc>
               <a:spcBef>
                 <a:spcPts val="0"/>
@@ -3449,7 +3449,7 @@
           <a:p>
             <a:pPr algn="just">
               <a:lnSpc>
-                <a:spcPct val="125000"/>
+                <a:spcPct val="110000"/>
               </a:lnSpc>
               <a:spcBef>
                 <a:spcPts val="0"/>
@@ -3471,7 +3471,7 @@
           <a:p>
             <a:pPr algn="just">
               <a:lnSpc>
-                <a:spcPct val="125000"/>
+                <a:spcPct val="110000"/>
               </a:lnSpc>
               <a:spcBef>
                 <a:spcPts val="0"/>

--- a/ppts_output_v3/15_教育费附加-地方教育附加风险指引.pptx
+++ b/ppts_output_v3/15_教育费附加-地方教育附加风险指引.pptx
@@ -3085,7 +3085,7 @@
     <p:bg>
       <p:bgPr>
         <a:solidFill>
-          <a:srgbClr val="1B3A5C"/>
+          <a:srgbClr val="3D4F6B"/>
         </a:solidFill>
         <a:effectLst/>
       </p:bgPr>
@@ -3099,143 +3099,20 @@
       <p:grpSpPr/>
       <p:sp>
         <p:nvSpPr>
-          <p:cNvPr id="2" name="TextBox 1"/>
-          <p:cNvSpPr txBox="1"/>
+          <p:cNvPr id="2" name="Oval 1"/>
+          <p:cNvSpPr/>
           <p:nvPr/>
         </p:nvSpPr>
         <p:spPr>
           <a:xfrm>
-            <a:off x="731520" y="1371600"/>
-            <a:ext cx="10728655" cy="2286000"/>
+            <a:off x="3353104" y="274320"/>
+            <a:ext cx="5486400" cy="5486400"/>
           </a:xfrm>
-          <a:prstGeom prst="rect">
-            <a:avLst/>
-          </a:prstGeom>
-          <a:noFill/>
-        </p:spPr>
-        <p:txBody>
-          <a:bodyPr wrap="square">
-            <a:spAutoFit/>
-          </a:bodyPr>
-          <a:lstStyle/>
-          <a:p>
-            <a:pPr algn="ctr">
-              <a:defRPr sz="4000" b="1">
-                <a:solidFill>
-                  <a:srgbClr val="FFFFFF"/>
-                </a:solidFill>
-              </a:defRPr>
-            </a:pPr>
-            <a:r>
-              <a:t>教育费附加、地方教育附加风险指引</a:t>
-            </a:r>
-          </a:p>
-        </p:txBody>
-      </p:sp>
-      <p:sp>
-        <p:nvSpPr>
-          <p:cNvPr id="3" name="TextBox 2"/>
-          <p:cNvSpPr txBox="1"/>
-          <p:nvPr/>
-        </p:nvSpPr>
-        <p:spPr>
-          <a:xfrm>
-            <a:off x="731520" y="3840480"/>
-            <a:ext cx="10728655" cy="731520"/>
-          </a:xfrm>
-          <a:prstGeom prst="rect">
-            <a:avLst/>
-          </a:prstGeom>
-          <a:noFill/>
-        </p:spPr>
-        <p:txBody>
-          <a:bodyPr wrap="none">
-            <a:spAutoFit/>
-          </a:bodyPr>
-          <a:lstStyle/>
-          <a:p>
-            <a:pPr algn="ctr">
-              <a:defRPr sz="2200">
-                <a:solidFill>
-                  <a:srgbClr val="AABBCC"/>
-                </a:solidFill>
-              </a:defRPr>
-            </a:pPr>
-            <a:r>
-              <a:t>共 1 个风险点</a:t>
-            </a:r>
-          </a:p>
-        </p:txBody>
-      </p:sp>
-      <p:sp>
-        <p:nvSpPr>
-          <p:cNvPr id="4" name="TextBox 3"/>
-          <p:cNvSpPr txBox="1"/>
-          <p:nvPr/>
-        </p:nvSpPr>
-        <p:spPr>
-          <a:xfrm>
-            <a:off x="731520" y="4572000"/>
-            <a:ext cx="10728655" cy="731520"/>
-          </a:xfrm>
-          <a:prstGeom prst="rect">
-            <a:avLst/>
-          </a:prstGeom>
-          <a:noFill/>
-        </p:spPr>
-        <p:txBody>
-          <a:bodyPr wrap="none">
-            <a:spAutoFit/>
-          </a:bodyPr>
-          <a:lstStyle/>
-          <a:p>
-            <a:pPr algn="ctr">
-              <a:defRPr sz="1600">
-                <a:solidFill>
-                  <a:srgbClr val="8899AA"/>
-                </a:solidFill>
-              </a:defRPr>
-            </a:pPr>
-            <a:r>
-              <a:t>税费合规指引 (2.0版)</a:t>
-            </a:r>
-          </a:p>
-        </p:txBody>
-      </p:sp>
-    </p:spTree>
-  </p:cSld>
-  <p:clrMapOvr>
-    <a:masterClrMapping/>
-  </p:clrMapOvr>
-</p:sld>
-</file>
-
-<file path=ppt/slides/slide2.xml><?xml version="1.0" encoding="utf-8"?>
-<p:sld xmlns:a="http://schemas.openxmlformats.org/drawingml/2006/main" xmlns:p="http://schemas.openxmlformats.org/presentationml/2006/main" xmlns:r="http://schemas.openxmlformats.org/officeDocument/2006/relationships">
-  <p:cSld>
-    <p:spTree>
-      <p:nvGrpSpPr>
-        <p:cNvPr id="1" name=""/>
-        <p:cNvGrpSpPr/>
-        <p:nvPr/>
-      </p:nvGrpSpPr>
-      <p:grpSpPr/>
-      <p:sp>
-        <p:nvSpPr>
-          <p:cNvPr id="2" name="Rectangle 1"/>
-          <p:cNvSpPr/>
-          <p:nvPr/>
-        </p:nvSpPr>
-        <p:spPr>
-          <a:xfrm>
-            <a:off x="0" y="0"/>
-            <a:ext cx="12191695" cy="594360"/>
-          </a:xfrm>
-          <a:prstGeom prst="rect">
+          <a:prstGeom prst="ellipse">
             <a:avLst/>
           </a:prstGeom>
           <a:solidFill>
-            <a:srgbClr val="1B3A5C"/>
+            <a:srgbClr val="798BA7"/>
           </a:solidFill>
           <a:ln>
             <a:noFill/>
@@ -3256,6 +3133,215 @@
           </a:fontRef>
         </p:style>
         <p:txBody>
+          <a:bodyPr rtlCol="0" anchor="ctr"/>
+          <a:lstStyle/>
+          <a:p>
+            <a:pPr algn="ctr"/>
+          </a:p>
+        </p:txBody>
+      </p:sp>
+      <p:sp>
+        <p:nvSpPr>
+          <p:cNvPr id="3" name="TextBox 2"/>
+          <p:cNvSpPr txBox="1"/>
+          <p:nvPr/>
+        </p:nvSpPr>
+        <p:spPr>
+          <a:xfrm>
+            <a:off x="731520" y="1645920"/>
+            <a:ext cx="10728655" cy="2286000"/>
+          </a:xfrm>
+          <a:prstGeom prst="rect">
+            <a:avLst/>
+          </a:prstGeom>
+          <a:noFill/>
+        </p:spPr>
+        <p:txBody>
+          <a:bodyPr wrap="square">
+            <a:spAutoFit/>
+          </a:bodyPr>
+          <a:lstStyle/>
+          <a:p>
+            <a:pPr algn="ctr">
+              <a:defRPr sz="4000" b="1">
+                <a:solidFill>
+                  <a:srgbClr val="FFFFFF"/>
+                </a:solidFill>
+              </a:defRPr>
+            </a:pPr>
+            <a:r>
+              <a:t>教育费附加、地方教育附加风险指引</a:t>
+            </a:r>
+          </a:p>
+        </p:txBody>
+      </p:sp>
+      <p:sp>
+        <p:nvSpPr>
+          <p:cNvPr id="4" name="Rectangle 3"/>
+          <p:cNvSpPr/>
+          <p:nvPr/>
+        </p:nvSpPr>
+        <p:spPr>
+          <a:xfrm>
+            <a:off x="4114800" y="3749039"/>
+            <a:ext cx="3962095" cy="18288"/>
+          </a:xfrm>
+          <a:prstGeom prst="rect">
+            <a:avLst/>
+          </a:prstGeom>
+          <a:solidFill>
+            <a:srgbClr val="FFFFFF"/>
+          </a:solidFill>
+          <a:ln>
+            <a:noFill/>
+          </a:ln>
+        </p:spPr>
+        <p:style>
+          <a:lnRef idx="1">
+            <a:schemeClr val="accent1"/>
+          </a:lnRef>
+          <a:fillRef idx="3">
+            <a:schemeClr val="accent1"/>
+          </a:fillRef>
+          <a:effectRef idx="2">
+            <a:schemeClr val="accent1"/>
+          </a:effectRef>
+          <a:fontRef idx="minor">
+            <a:schemeClr val="lt1"/>
+          </a:fontRef>
+        </p:style>
+        <p:txBody>
+          <a:bodyPr rtlCol="0" anchor="ctr"/>
+          <a:lstStyle/>
+          <a:p>
+            <a:pPr algn="ctr"/>
+          </a:p>
+        </p:txBody>
+      </p:sp>
+      <p:sp>
+        <p:nvSpPr>
+          <p:cNvPr id="5" name="TextBox 4"/>
+          <p:cNvSpPr txBox="1"/>
+          <p:nvPr/>
+        </p:nvSpPr>
+        <p:spPr>
+          <a:xfrm>
+            <a:off x="731520" y="3931920"/>
+            <a:ext cx="10728655" cy="548640"/>
+          </a:xfrm>
+          <a:prstGeom prst="rect">
+            <a:avLst/>
+          </a:prstGeom>
+          <a:noFill/>
+        </p:spPr>
+        <p:txBody>
+          <a:bodyPr wrap="none">
+            <a:spAutoFit/>
+          </a:bodyPr>
+          <a:lstStyle/>
+          <a:p>
+            <a:pPr algn="ctr">
+              <a:defRPr sz="2200">
+                <a:solidFill>
+                  <a:srgbClr val="CCCCCC"/>
+                </a:solidFill>
+              </a:defRPr>
+            </a:pPr>
+            <a:r>
+              <a:t>共 1 个风险点</a:t>
+            </a:r>
+          </a:p>
+        </p:txBody>
+      </p:sp>
+      <p:sp>
+        <p:nvSpPr>
+          <p:cNvPr id="6" name="TextBox 5"/>
+          <p:cNvSpPr txBox="1"/>
+          <p:nvPr/>
+        </p:nvSpPr>
+        <p:spPr>
+          <a:xfrm>
+            <a:off x="731520" y="4572000"/>
+            <a:ext cx="10728655" cy="731520"/>
+          </a:xfrm>
+          <a:prstGeom prst="rect">
+            <a:avLst/>
+          </a:prstGeom>
+          <a:noFill/>
+        </p:spPr>
+        <p:txBody>
+          <a:bodyPr wrap="none">
+            <a:spAutoFit/>
+          </a:bodyPr>
+          <a:lstStyle/>
+          <a:p>
+            <a:pPr algn="ctr">
+              <a:defRPr sz="1600">
+                <a:solidFill>
+                  <a:srgbClr val="AABBCC"/>
+                </a:solidFill>
+              </a:defRPr>
+            </a:pPr>
+            <a:r>
+              <a:t>税费合规指引 (2.0版)</a:t>
+            </a:r>
+          </a:p>
+        </p:txBody>
+      </p:sp>
+    </p:spTree>
+  </p:cSld>
+  <p:clrMapOvr>
+    <a:masterClrMapping/>
+  </p:clrMapOvr>
+</p:sld>
+</file>
+
+<file path=ppt/slides/slide2.xml><?xml version="1.0" encoding="utf-8"?>
+<p:sld xmlns:a="http://schemas.openxmlformats.org/drawingml/2006/main" xmlns:p="http://schemas.openxmlformats.org/presentationml/2006/main" xmlns:r="http://schemas.openxmlformats.org/officeDocument/2006/relationships">
+  <p:cSld>
+    <p:spTree>
+      <p:nvGrpSpPr>
+        <p:cNvPr id="1" name=""/>
+        <p:cNvGrpSpPr/>
+        <p:nvPr/>
+      </p:nvGrpSpPr>
+      <p:grpSpPr/>
+      <p:sp>
+        <p:nvSpPr>
+          <p:cNvPr id="2" name="Rectangle 1"/>
+          <p:cNvSpPr/>
+          <p:nvPr/>
+        </p:nvSpPr>
+        <p:spPr>
+          <a:xfrm>
+            <a:off x="0" y="0"/>
+            <a:ext cx="12191695" cy="594360"/>
+          </a:xfrm>
+          <a:prstGeom prst="rect">
+            <a:avLst/>
+          </a:prstGeom>
+          <a:solidFill>
+            <a:srgbClr val="3D4F6B"/>
+          </a:solidFill>
+          <a:ln>
+            <a:noFill/>
+          </a:ln>
+        </p:spPr>
+        <p:style>
+          <a:lnRef idx="1">
+            <a:schemeClr val="accent1"/>
+          </a:lnRef>
+          <a:fillRef idx="3">
+            <a:schemeClr val="accent1"/>
+          </a:fillRef>
+          <a:effectRef idx="2">
+            <a:schemeClr val="accent1"/>
+          </a:effectRef>
+          <a:fontRef idx="minor">
+            <a:schemeClr val="lt1"/>
+          </a:fontRef>
+        </p:style>
+        <p:txBody>
           <a:bodyPr rtlCol="0" anchor="ctr" wrap="square" lIns="365760"/>
           <a:lstStyle/>
           <a:p>
@@ -3307,7 +3393,7 @@
             <a:r>
               <a:rPr sz="1600" b="1">
                 <a:solidFill>
-                  <a:srgbClr val="1B3A5C"/>
+                  <a:srgbClr val="3D4F6B"/>
                 </a:solidFill>
                 <a:latin typeface="Microsoft YaHei"/>
               </a:rPr>
@@ -3489,6 +3575,49 @@
               </a:rPr>
               <a:t>企业核查补缴增值税或消费税时，是否同时补缴教育费附加、地方教育附加。</a:t>
             </a:r>
+          </a:p>
+        </p:txBody>
+      </p:sp>
+      <p:sp>
+        <p:nvSpPr>
+          <p:cNvPr id="4" name="Rectangle 3"/>
+          <p:cNvSpPr/>
+          <p:nvPr/>
+        </p:nvSpPr>
+        <p:spPr>
+          <a:xfrm>
+            <a:off x="457200" y="6720840"/>
+            <a:ext cx="11277295" cy="27432"/>
+          </a:xfrm>
+          <a:prstGeom prst="rect">
+            <a:avLst/>
+          </a:prstGeom>
+          <a:solidFill>
+            <a:srgbClr val="3D4F6B"/>
+          </a:solidFill>
+          <a:ln>
+            <a:noFill/>
+          </a:ln>
+        </p:spPr>
+        <p:style>
+          <a:lnRef idx="1">
+            <a:schemeClr val="accent1"/>
+          </a:lnRef>
+          <a:fillRef idx="3">
+            <a:schemeClr val="accent1"/>
+          </a:fillRef>
+          <a:effectRef idx="2">
+            <a:schemeClr val="accent1"/>
+          </a:effectRef>
+          <a:fontRef idx="minor">
+            <a:schemeClr val="lt1"/>
+          </a:fontRef>
+        </p:style>
+        <p:txBody>
+          <a:bodyPr rtlCol="0" anchor="ctr"/>
+          <a:lstStyle/>
+          <a:p>
+            <a:pPr algn="ctr"/>
           </a:p>
         </p:txBody>
       </p:sp>

--- a/ppts_output_v3/15_教育费附加-地方教育附加风险指引.pptx
+++ b/ppts_output_v3/15_教育费附加-地方教育附加风险指引.pptx
@@ -3167,6 +3167,7 @@
                 <a:solidFill>
                   <a:srgbClr val="FFFFFF"/>
                 </a:solidFill>
+                <a:latin typeface="Microsoft YaHei"/>
               </a:defRPr>
             </a:pPr>
             <a:r>
@@ -3245,6 +3246,7 @@
                 <a:solidFill>
                   <a:srgbClr val="CCCCCC"/>
                 </a:solidFill>
+                <a:latin typeface="Microsoft YaHei"/>
               </a:defRPr>
             </a:pPr>
             <a:r>
@@ -3280,6 +3282,7 @@
                 <a:solidFill>
                   <a:srgbClr val="AABBCC"/>
                 </a:solidFill>
+                <a:latin typeface="Microsoft YaHei"/>
               </a:defRPr>
             </a:pPr>
             <a:r>
@@ -3351,6 +3354,7 @@
                 <a:solidFill>
                   <a:srgbClr val="FFFFFF"/>
                 </a:solidFill>
+                <a:latin typeface="Microsoft YaHei"/>
               </a:rPr>
               <a:t>教育费附加、地方教育附加风险指引  |  风险点 1</a:t>
             </a:r>
